--- a/web/downloads/shared/w2/W2.pptx
+++ b/web/downloads/shared/w2/W2.pptx
@@ -3348,7 +3348,7 @@
                 </a:solidFill>
                 <a:latin typeface="Pretendard Black"/>
               </a:rPr>
-              <a:t>본 연구 모델의 예측 범위</a:t>
+              <a:t>모델의 예측 범위와 한계</a:t>
             </a:r>
           </a:p>
         </p:txBody>
@@ -3520,7 +3520,7 @@
                 </a:solidFill>
                 <a:latin typeface="Pretendard SemiBold"/>
               </a:rPr>
-              <a:t>본 연구 모델: 한 번의 예측마다 가운데 슬라이스 1장 출력</a:t>
+              <a:t>한 번의 예측 = 양옆 이웃 [t−k, t+k] → 가운데 슬라이스 t 1장 출력</a:t>
             </a:r>
           </a:p>
           <a:p>
@@ -3548,7 +3548,7 @@
                 </a:solidFill>
                 <a:latin typeface="Pretendard SemiBold"/>
               </a:rPr>
-              <a:t>입력 = 예측 위치 기준 6개 측정 슬라이스 (z±3, z±9, z±15)</a:t>
+              <a:t>입력 채널은 2개 (t−k, t+k) — 가장 단순한 양옆 이웃 구성</a:t>
             </a:r>
           </a:p>
           <a:p>
@@ -3576,7 +3576,7 @@
                 </a:solidFill>
                 <a:latin typeface="Pretendard SemiBold"/>
               </a:rPr>
-              <a:t>학습 시나리오: k=2 정규 측정 (짝수 측정 / 홀수 예측)</a:t>
+              <a:t>이웃 거리 k=1 로 학습 — k 가 커지면(이웃이 멀어지면) 정확도 저하</a:t>
             </a:r>
           </a:p>
           <a:p>
@@ -3604,7 +3604,7 @@
                 </a:solidFill>
                 <a:latin typeface="Pretendard SemiBold"/>
               </a:rPr>
-              <a:t>z=4·7 측정 상태에서 z=5·6을 모두 복원하려면 모델을 두 번 호출</a:t>
+              <a:t>이웃 거리별 한계는 §6.5-C 에서 k=1·2·3·5 로 직접 재현</a:t>
             </a:r>
           </a:p>
           <a:p>
@@ -3632,7 +3632,7 @@
                 </a:solidFill>
                 <a:latin typeface="Pretendard SemiBold"/>
               </a:rPr>
-              <a:t>학습 분포 밖의 불규칙 측정 패턴에서는 정확도가 떨어질 수 있음 — W6에서 다룸</a:t>
+              <a:t>학습 도메인 밖(다른 암석)에서는 일반화가 깨질 수 있음 — W6 cross-domain에서 다룸</a:t>
             </a:r>
           </a:p>
         </p:txBody>
@@ -4458,7 +4458,7 @@
                 </a:solidFill>
                 <a:latin typeface="Pretendard SemiBold"/>
               </a:rPr>
-              <a:t>SliceDataset — sparse triplet (before, middle, after) 데이터 구성</a:t>
+              <a:t>SliceDataset — 이웃 입력 (t±k → 가운데 t) 데이터 구성</a:t>
             </a:r>
           </a:p>
           <a:p>
@@ -5767,7 +5767,7 @@
                 </a:solidFill>
                 <a:latin typeface="Pretendard Black"/>
               </a:rPr>
-              <a:t>SliceDataset — sparse triplet</a:t>
+              <a:t>SliceDataset — 이웃 입력</a:t>
             </a:r>
           </a:p>
         </p:txBody>
@@ -5978,7 +5978,7 @@
                 </a:solidFill>
                 <a:latin typeface="Pretendard SemiBold"/>
               </a:rPr>
-              <a:t>input = [slice_before, slice_after] — sparse 측정에서 얻은 앞·뒤 슬라이스</a:t>
+              <a:t>input = [vol[t−k], vol[t+k]] — 양옆 이웃 슬라이스 t±k</a:t>
             </a:r>
           </a:p>
           <a:p>
@@ -6006,7 +6006,7 @@
                 </a:solidFill>
                 <a:latin typeface="Pretendard SemiBold"/>
               </a:rPr>
-              <a:t>target = slice_middle — 가운데 슬라이스 GT (학습 시에만 사용)</a:t>
+              <a:t>target = vol[t] — 가운데 슬라이스 t (학습 시에만 정답으로 사용)</a:t>
             </a:r>
           </a:p>
           <a:p>
@@ -7657,7 +7657,7 @@
                 </a:solidFill>
                 <a:latin typeface="Pretendard SemiBold"/>
               </a:rPr>
-              <a:t>학습 후 전체 부피의 누락 슬라이스를 모델로 복원</a:t>
+              <a:t>학습 후 각 슬라이스를 양옆 이웃 t±k 에서 모델로 예측</a:t>
             </a:r>
           </a:p>
           <a:p>
